--- a/classes/parte-0-fundamentos-y-prerrequisitos/015-python-para-seguridad-fundamentos-del-lenguaje/clase-015-presentacion.pptx
+++ b/classes/parte-0-fundamentos-y-prerrequisitos/015-python-para-seguridad-fundamentos-del-lenguaje/clase-015-presentacion.pptx
@@ -17,6 +17,9 @@
     <p:sldId id="265" r:id="rId16"/>
     <p:sldId id="266" r:id="rId17"/>
     <p:sldId id="267" r:id="rId18"/>
+    <p:sldId id="268" r:id="rId19"/>
+    <p:sldId id="269" r:id="rId20"/>
+    <p:sldId id="270" r:id="rId21"/>
   </p:sldIdLst>
   <p:sldSz cx="9144000" cy="6858000" type="screen4x3"/>
   <p:notesSz cx="6858000" cy="9144000"/>
@@ -3198,7 +3201,7 @@
                   <a:srgbClr val="0B3D2E"/>
                 </a:solidFill>
               </a:rPr>
-              <a:t>⚠️ Errores comunes</a:t>
+              <a:t>✍️ Ejercicios</a:t>
             </a:r>
           </a:p>
         </p:txBody>
@@ -3236,67 +3239,97 @@
                   <a:srgbClr val="22282E"/>
                 </a:solidFill>
               </a:rPr>
-              <a:t>•  TypeError: a bytes-like object is required — Mezclas str y bytes. Convierte con .encode()/.decode().</a:t>
-            </a:r>
-          </a:p>
-          <a:p>
-            <a:pPr>
-              <a:spcAft>
-                <a:spcPts val="600"/>
-              </a:spcAft>
-            </a:pPr>
-            <a:r>
-              <a:rPr sz="1500">
-                <a:solidFill>
-                  <a:srgbClr val="22282E"/>
-                </a:solidFill>
-              </a:rPr>
-              <a:t>•  UnicodeDecodeError al leer un archivo — Codificación distinta. Abre con encoding='utf-8', errors='replace' o en modo binario.</a:t>
-            </a:r>
-          </a:p>
-          <a:p>
-            <a:pPr>
-              <a:spcAft>
-                <a:spcPts val="600"/>
-              </a:spcAft>
-            </a:pPr>
-            <a:r>
-              <a:rPr sz="1500">
-                <a:solidFill>
-                  <a:srgbClr val="22282E"/>
-                </a:solidFill>
-              </a:rPr>
-              <a:t>•  El script modifica el Python del sistema — No usaste venv. Crea y activa un entorno virtual por proyecto.</a:t>
-            </a:r>
-          </a:p>
-          <a:p>
-            <a:pPr>
-              <a:spcAft>
-                <a:spcPts val="600"/>
-              </a:spcAft>
-            </a:pPr>
-            <a:r>
-              <a:rPr sz="1500">
-                <a:solidFill>
-                  <a:srgbClr val="22282E"/>
-                </a:solidFill>
-              </a:rPr>
-              <a:t>•  IndentationError — Mezcla de tabs y espacios. Usa 4 espacios de forma consistente.</a:t>
-            </a:r>
-          </a:p>
-          <a:p>
-            <a:pPr>
-              <a:spcAft>
-                <a:spcPts val="600"/>
-              </a:spcAft>
-            </a:pPr>
-            <a:r>
-              <a:rPr sz="1500">
-                <a:solidFill>
-                  <a:srgbClr val="22282E"/>
-                </a:solidFill>
-              </a:rPr>
-              <a:t>•  El programa peta ante entradas raras — Falta manejo de excepciones. Envuelve E/S y parseo en try/except.</a:t>
+              <a:t>•  Escribe una comprensión que devuelva solo las IPs privadas de una lista dada.</a:t>
+            </a:r>
+          </a:p>
+          <a:p>
+            <a:pPr>
+              <a:spcAft>
+                <a:spcPts val="600"/>
+              </a:spcAft>
+            </a:pPr>
+            <a:r>
+              <a:rPr sz="1500">
+                <a:solidFill>
+                  <a:srgbClr val="22282E"/>
+                </a:solidFill>
+              </a:rPr>
+              <a:t>•  Crea un diccionario que agrupe usuarios por su shell leyendo /etc/passwd.</a:t>
+            </a:r>
+          </a:p>
+          <a:p>
+            <a:pPr>
+              <a:spcAft>
+                <a:spcPts val="600"/>
+              </a:spcAft>
+            </a:pPr>
+            <a:r>
+              <a:rPr sz="1500">
+                <a:solidFill>
+                  <a:srgbClr val="22282E"/>
+                </a:solidFill>
+              </a:rPr>
+              <a:t>•  Implementa una función que valide si una cadena es una IPv4 bien formada, sin usar expresiones regulares.</a:t>
+            </a:r>
+          </a:p>
+          <a:p>
+            <a:pPr>
+              <a:spcAft>
+                <a:spcPts val="600"/>
+              </a:spcAft>
+            </a:pPr>
+            <a:r>
+              <a:rPr sz="1500">
+                <a:solidFill>
+                  <a:srgbClr val="22282E"/>
+                </a:solidFill>
+              </a:rPr>
+              <a:t>•  Lee un archivo grande línea a línea y extrae todas las que contengan un código HTTP 5xx.</a:t>
+            </a:r>
+          </a:p>
+          <a:p>
+            <a:pPr>
+              <a:spcAft>
+                <a:spcPts val="600"/>
+              </a:spcAft>
+            </a:pPr>
+            <a:r>
+              <a:rPr sz="1500">
+                <a:solidFill>
+                  <a:srgbClr val="22282E"/>
+                </a:solidFill>
+              </a:rPr>
+              <a:t>•  Añade manejo de excepciones para los casos de permiso denegado y archivo inexistente.</a:t>
+            </a:r>
+          </a:p>
+          <a:p>
+            <a:pPr>
+              <a:spcAft>
+                <a:spcPts val="600"/>
+              </a:spcAft>
+            </a:pPr>
+            <a:r>
+              <a:rPr sz="1500">
+                <a:solidFill>
+                  <a:srgbClr val="22282E"/>
+                </a:solidFill>
+              </a:rPr>
+              <a:t>•  Empaqueta tu utilidad con argparse, incluyendo --help y un argumento opcional con valor por defecto.</a:t>
+            </a:r>
+          </a:p>
+          <a:p>
+            <a:pPr>
+              <a:spcAft>
+                <a:spcPts val="600"/>
+              </a:spcAft>
+            </a:pPr>
+            <a:r>
+              <a:rPr sz="1500">
+                <a:solidFill>
+                  <a:srgbClr val="22282E"/>
+                </a:solidFill>
+              </a:rPr>
+              <a:t>•  Refactoriza un bucle anidado en una comprensión y discute cuándo esa transformación mejora o empeora la legibilidad.</a:t>
             </a:r>
           </a:p>
         </p:txBody>
@@ -3347,7 +3380,7 @@
                   <a:srgbClr val="0B3D2E"/>
                 </a:solidFill>
               </a:rPr>
-              <a:t>❓ Preguntas frecuentes</a:t>
+              <a:t>📝 Reto verificable</a:t>
             </a:r>
           </a:p>
         </p:txBody>
@@ -3385,52 +3418,22 @@
                   <a:srgbClr val="22282E"/>
                 </a:solidFill>
               </a:rPr>
-              <a:t>•  ❓ ¿Python 2 o 3? Solo Python 3. Python 2 está fuera de soporte desde 2020; todo el material ofensivo moderno usa 3.</a:t>
-            </a:r>
-          </a:p>
-          <a:p>
-            <a:pPr>
-              <a:spcAft>
-                <a:spcPts val="600"/>
-              </a:spcAft>
-            </a:pPr>
-            <a:r>
-              <a:rPr sz="1500">
-                <a:solidFill>
-                  <a:srgbClr val="22282E"/>
-                </a:solidFill>
-              </a:rPr>
-              <a:t>•  ❓ ¿Por qué str vs. bytes es tan importante en seguridad? Porque sockets, criptografía y protocolos binarios trabajan con bytes. Confundirlos es la causa nº1 de errores en herramientas de red.</a:t>
-            </a:r>
-          </a:p>
-          <a:p>
-            <a:pPr>
-              <a:spcAft>
-                <a:spcPts val="600"/>
-              </a:spcAft>
-            </a:pPr>
-            <a:r>
-              <a:rPr sz="1500">
-                <a:solidFill>
-                  <a:srgbClr val="22282E"/>
-                </a:solidFill>
-              </a:rPr>
-              <a:t>•  ❓ ¿Necesito venv para todo? Es una buena práctica: aísla dependencias, facilita reproducibilidad y evita romper herramientas del sistema que dependen de Python.</a:t>
-            </a:r>
-          </a:p>
-          <a:p>
-            <a:pPr>
-              <a:spcAft>
-                <a:spcPts val="600"/>
-              </a:spcAft>
-            </a:pPr>
-            <a:r>
-              <a:rPr sz="1500">
-                <a:solidFill>
-                  <a:srgbClr val="22282E"/>
-                </a:solidFill>
-              </a:rPr>
-              <a:t>•  ❓ ¿Cuándo usar subprocess en vez de librerías? Para invocar herramientas externas (nmap, etc.). Cuando exista una librería nativa (requests, socket), prefiérela: es más segura y controlable.</a:t>
+              <a:t>•  Escribe logstats.py, una herramienta CLI que reciba la ruta de un log y un patrón, y produzca un pequeño informe: total de líneas, líneas coincidentes, top 5 de las IPs más frecuentes (si las hay) y…</a:t>
+            </a:r>
+          </a:p>
+          <a:p>
+            <a:pPr>
+              <a:spcAft>
+                <a:spcPts val="600"/>
+              </a:spcAft>
+            </a:pPr>
+            <a:r>
+              <a:rPr sz="1500">
+                <a:solidFill>
+                  <a:srgbClr val="22282E"/>
+                </a:solidFill>
+              </a:rPr>
+              <a:t>•  Criterio de aceptación: ejecutar python3 logstats.py --help muestra el uso; corriendo sobre un log real produce el informe correcto; y ante un archivo inexistente termina con un mensaje amable y un…</a:t>
             </a:r>
           </a:p>
         </p:txBody>
@@ -3481,7 +3484,7 @@
                   <a:srgbClr val="0B3D2E"/>
                 </a:solidFill>
               </a:rPr>
-              <a:t>🔗 Referencias</a:t>
+              <a:t>⚠️ Errores comunes</a:t>
             </a:r>
           </a:p>
         </p:txBody>
@@ -3519,7 +3522,305 @@
                   <a:srgbClr val="22282E"/>
                 </a:solidFill>
               </a:rPr>
-              <a:t>•  Seitz &amp; Arnold, Black Hat Python (No Starch Press).</a:t>
+              <a:t>•  TypeError: a bytes-like object is required — Mezclas str y bytes. Convierte con .encode() o .decode() según corresponda.</a:t>
+            </a:r>
+          </a:p>
+          <a:p>
+            <a:pPr>
+              <a:spcAft>
+                <a:spcPts val="600"/>
+              </a:spcAft>
+            </a:pPr>
+            <a:r>
+              <a:rPr sz="1500">
+                <a:solidFill>
+                  <a:srgbClr val="22282E"/>
+                </a:solidFill>
+              </a:rPr>
+              <a:t>•  UnicodeDecodeError al leer un archivo — La codificación no coincide. Abre con encoding='utf-8', errors='replace' o en modo binario.</a:t>
+            </a:r>
+          </a:p>
+          <a:p>
+            <a:pPr>
+              <a:spcAft>
+                <a:spcPts val="600"/>
+              </a:spcAft>
+            </a:pPr>
+            <a:r>
+              <a:rPr sz="1500">
+                <a:solidFill>
+                  <a:srgbClr val="22282E"/>
+                </a:solidFill>
+              </a:rPr>
+              <a:t>•  El script modifica el Python del sistema — No usaste venv. Crea y activa un entorno virtual por proyecto antes de instalar.</a:t>
+            </a:r>
+          </a:p>
+          <a:p>
+            <a:pPr>
+              <a:spcAft>
+                <a:spcPts val="600"/>
+              </a:spcAft>
+            </a:pPr>
+            <a:r>
+              <a:rPr sz="1500">
+                <a:solidFill>
+                  <a:srgbClr val="22282E"/>
+                </a:solidFill>
+              </a:rPr>
+              <a:t>•  IndentationError — Mezcla de tabuladores y espacios. Usa 4 espacios de forma consistente.</a:t>
+            </a:r>
+          </a:p>
+          <a:p>
+            <a:pPr>
+              <a:spcAft>
+                <a:spcPts val="600"/>
+              </a:spcAft>
+            </a:pPr>
+            <a:r>
+              <a:rPr sz="1500">
+                <a:solidFill>
+                  <a:srgbClr val="22282E"/>
+                </a:solidFill>
+              </a:rPr>
+              <a:t>•  El programa peta ante entradas raras — Falta manejo de excepciones. Envuelve la E/S y el parseo en try/except.</a:t>
+            </a:r>
+          </a:p>
+          <a:p>
+            <a:pPr>
+              <a:spcAft>
+                <a:spcPts val="600"/>
+              </a:spcAft>
+            </a:pPr>
+            <a:r>
+              <a:rPr sz="1500">
+                <a:solidFill>
+                  <a:srgbClr val="22282E"/>
+                </a:solidFill>
+              </a:rPr>
+              <a:t>•  except: oculta un bug real — Capturaste todo de forma genérica. Captura tipos concretos como FileNotFoundError.</a:t>
+            </a:r>
+          </a:p>
+        </p:txBody>
+      </p:sp>
+    </p:spTree>
+  </p:cSld>
+  <p:clrMapOvr>
+    <a:masterClrMapping/>
+  </p:clrMapOvr>
+</p:sld>
+</file>
+
+<file path=ppt/slides/slide13.xml><?xml version="1.0" encoding="utf-8"?>
+<p:sld xmlns:a="http://schemas.openxmlformats.org/drawingml/2006/main" xmlns:p="http://schemas.openxmlformats.org/presentationml/2006/main" xmlns:r="http://schemas.openxmlformats.org/officeDocument/2006/relationships">
+  <p:cSld>
+    <p:spTree>
+      <p:nvGrpSpPr>
+        <p:cNvPr id="1" name=""/>
+        <p:cNvGrpSpPr/>
+        <p:nvPr/>
+      </p:nvGrpSpPr>
+      <p:grpSpPr/>
+      <p:sp>
+        <p:nvSpPr>
+          <p:cNvPr id="2" name="TextBox 1"/>
+          <p:cNvSpPr txBox="1"/>
+          <p:nvPr/>
+        </p:nvSpPr>
+        <p:spPr>
+          <a:xfrm>
+            <a:off x="457200" y="320040"/>
+            <a:ext cx="8229600" cy="822960"/>
+          </a:xfrm>
+          <a:prstGeom prst="rect">
+            <a:avLst/>
+          </a:prstGeom>
+          <a:noFill/>
+        </p:spPr>
+        <p:txBody>
+          <a:bodyPr wrap="square">
+            <a:spAutoFit/>
+          </a:bodyPr>
+          <a:lstStyle/>
+          <a:p>
+            <a:r>
+              <a:rPr sz="2600" b="1">
+                <a:solidFill>
+                  <a:srgbClr val="0B3D2E"/>
+                </a:solidFill>
+              </a:rPr>
+              <a:t>❓ Preguntas frecuentes</a:t>
+            </a:r>
+          </a:p>
+        </p:txBody>
+      </p:sp>
+      <p:sp>
+        <p:nvSpPr>
+          <p:cNvPr id="3" name="TextBox 2"/>
+          <p:cNvSpPr txBox="1"/>
+          <p:nvPr/>
+        </p:nvSpPr>
+        <p:spPr>
+          <a:xfrm>
+            <a:off x="457200" y="1280160"/>
+            <a:ext cx="8229600" cy="4937760"/>
+          </a:xfrm>
+          <a:prstGeom prst="rect">
+            <a:avLst/>
+          </a:prstGeom>
+          <a:noFill/>
+        </p:spPr>
+        <p:txBody>
+          <a:bodyPr wrap="square">
+            <a:spAutoFit/>
+          </a:bodyPr>
+          <a:lstStyle/>
+          <a:p>
+            <a:pPr>
+              <a:spcAft>
+                <a:spcPts val="600"/>
+              </a:spcAft>
+            </a:pPr>
+            <a:r>
+              <a:rPr sz="1500">
+                <a:solidFill>
+                  <a:srgbClr val="22282E"/>
+                </a:solidFill>
+              </a:rPr>
+              <a:t>•  ❓ ¿Python 2 o 3? Solo Python 3. Python 2 está fuera de soporte desde 2020 y todo el material ofensivo y defensivo moderno usa la versión 3.</a:t>
+            </a:r>
+          </a:p>
+          <a:p>
+            <a:pPr>
+              <a:spcAft>
+                <a:spcPts val="600"/>
+              </a:spcAft>
+            </a:pPr>
+            <a:r>
+              <a:rPr sz="1500">
+                <a:solidFill>
+                  <a:srgbClr val="22282E"/>
+                </a:solidFill>
+              </a:rPr>
+              <a:t>•  ❓ ¿Por qué str vs. bytes es tan importante en seguridad? Porque los sockets, la criptografía y los protocolos binarios trabajan con bytes. Confundirlos es la causa número uno de errores en…</a:t>
+            </a:r>
+          </a:p>
+          <a:p>
+            <a:pPr>
+              <a:spcAft>
+                <a:spcPts val="600"/>
+              </a:spcAft>
+            </a:pPr>
+            <a:r>
+              <a:rPr sz="1500">
+                <a:solidFill>
+                  <a:srgbClr val="22282E"/>
+                </a:solidFill>
+              </a:rPr>
+              <a:t>•  ❓ ¿Necesito venv para todo? Es una buena práctica prácticamente siempre: aísla dependencias, facilita la reproducibilidad y evita romper herramientas del sistema que dependen de Python.</a:t>
+            </a:r>
+          </a:p>
+          <a:p>
+            <a:pPr>
+              <a:spcAft>
+                <a:spcPts val="600"/>
+              </a:spcAft>
+            </a:pPr>
+            <a:r>
+              <a:rPr sz="1500">
+                <a:solidFill>
+                  <a:srgbClr val="22282E"/>
+                </a:solidFill>
+              </a:rPr>
+              <a:t>•  ❓ ¿Cuándo uso subprocess en vez de una librería? Para invocar herramientas externas que no tienen equivalente nativo (nmap, por ejemplo). Cuando existe una librería nativa (requests, socket)…</a:t>
+            </a:r>
+          </a:p>
+        </p:txBody>
+      </p:sp>
+    </p:spTree>
+  </p:cSld>
+  <p:clrMapOvr>
+    <a:masterClrMapping/>
+  </p:clrMapOvr>
+</p:sld>
+</file>
+
+<file path=ppt/slides/slide14.xml><?xml version="1.0" encoding="utf-8"?>
+<p:sld xmlns:a="http://schemas.openxmlformats.org/drawingml/2006/main" xmlns:p="http://schemas.openxmlformats.org/presentationml/2006/main" xmlns:r="http://schemas.openxmlformats.org/officeDocument/2006/relationships">
+  <p:cSld>
+    <p:spTree>
+      <p:nvGrpSpPr>
+        <p:cNvPr id="1" name=""/>
+        <p:cNvGrpSpPr/>
+        <p:nvPr/>
+      </p:nvGrpSpPr>
+      <p:grpSpPr/>
+      <p:sp>
+        <p:nvSpPr>
+          <p:cNvPr id="2" name="TextBox 1"/>
+          <p:cNvSpPr txBox="1"/>
+          <p:nvPr/>
+        </p:nvSpPr>
+        <p:spPr>
+          <a:xfrm>
+            <a:off x="457200" y="320040"/>
+            <a:ext cx="8229600" cy="822960"/>
+          </a:xfrm>
+          <a:prstGeom prst="rect">
+            <a:avLst/>
+          </a:prstGeom>
+          <a:noFill/>
+        </p:spPr>
+        <p:txBody>
+          <a:bodyPr wrap="square">
+            <a:spAutoFit/>
+          </a:bodyPr>
+          <a:lstStyle/>
+          <a:p>
+            <a:r>
+              <a:rPr sz="2600" b="1">
+                <a:solidFill>
+                  <a:srgbClr val="0B3D2E"/>
+                </a:solidFill>
+              </a:rPr>
+              <a:t>🔗 Referencias</a:t>
+            </a:r>
+          </a:p>
+        </p:txBody>
+      </p:sp>
+      <p:sp>
+        <p:nvSpPr>
+          <p:cNvPr id="3" name="TextBox 2"/>
+          <p:cNvSpPr txBox="1"/>
+          <p:nvPr/>
+        </p:nvSpPr>
+        <p:spPr>
+          <a:xfrm>
+            <a:off x="457200" y="1280160"/>
+            <a:ext cx="8229600" cy="4937760"/>
+          </a:xfrm>
+          <a:prstGeom prst="rect">
+            <a:avLst/>
+          </a:prstGeom>
+          <a:noFill/>
+        </p:spPr>
+        <p:txBody>
+          <a:bodyPr wrap="square">
+            <a:spAutoFit/>
+          </a:bodyPr>
+          <a:lstStyle/>
+          <a:p>
+            <a:pPr>
+              <a:spcAft>
+                <a:spcPts val="600"/>
+              </a:spcAft>
+            </a:pPr>
+            <a:r>
+              <a:rPr sz="1500">
+                <a:solidFill>
+                  <a:srgbClr val="22282E"/>
+                </a:solidFill>
+              </a:rPr>
+              <a:t>•  Seitz &amp; Arnold, Black Hat Python (2ª ed., No Starch Press).</a:t>
             </a:r>
           </a:p>
           <a:p>
@@ -3549,7 +3850,22 @@
                   <a:srgbClr val="22282E"/>
                 </a:solidFill>
               </a:rPr>
-              <a:t>•  Python argparse tutorial — &lt;https://docs.python.org/3/howto/argparse.html&gt;</a:t>
+              <a:t>•  Python argparse HOWTO — &lt;https://docs.python.org/3/howto/argparse.html&gt;</a:t>
+            </a:r>
+          </a:p>
+          <a:p>
+            <a:pPr>
+              <a:spcAft>
+                <a:spcPts val="600"/>
+              </a:spcAft>
+            </a:pPr>
+            <a:r>
+              <a:rPr sz="1500">
+                <a:solidFill>
+                  <a:srgbClr val="22282E"/>
+                </a:solidFill>
+              </a:rPr>
+              <a:t>•  Python hashlib — &lt;https://docs.python.org/3/library/hashlib.html&gt;</a:t>
             </a:r>
           </a:p>
           <a:p>
@@ -3569,6 +3885,81 @@
           </a:p>
         </p:txBody>
       </p:sp>
+    </p:spTree>
+  </p:cSld>
+  <p:clrMapOvr>
+    <a:masterClrMapping/>
+  </p:clrMapOvr>
+</p:sld>
+</file>
+
+<file path=ppt/slides/slide15.xml><?xml version="1.0" encoding="utf-8"?>
+<p:sld xmlns:a="http://schemas.openxmlformats.org/drawingml/2006/main" xmlns:p="http://schemas.openxmlformats.org/presentationml/2006/main" xmlns:r="http://schemas.openxmlformats.org/officeDocument/2006/relationships">
+  <p:cSld>
+    <p:spTree>
+      <p:nvGrpSpPr>
+        <p:cNvPr id="1" name=""/>
+        <p:cNvGrpSpPr/>
+        <p:nvPr/>
+      </p:nvGrpSpPr>
+      <p:grpSpPr/>
+      <p:sp>
+        <p:nvSpPr>
+          <p:cNvPr id="2" name="TextBox 1"/>
+          <p:cNvSpPr txBox="1"/>
+          <p:nvPr/>
+        </p:nvSpPr>
+        <p:spPr>
+          <a:xfrm>
+            <a:off x="457200" y="274320"/>
+            <a:ext cx="8229600" cy="640080"/>
+          </a:xfrm>
+          <a:prstGeom prst="rect">
+            <a:avLst/>
+          </a:prstGeom>
+          <a:noFill/>
+        </p:spPr>
+        <p:txBody>
+          <a:bodyPr wrap="square">
+            <a:spAutoFit/>
+          </a:bodyPr>
+          <a:lstStyle/>
+          <a:p>
+            <a:r>
+              <a:rPr sz="2200" b="1">
+                <a:solidFill>
+                  <a:srgbClr val="0B3D2E"/>
+                </a:solidFill>
+              </a:rPr>
+              <a:t>Diagrama de la clase</a:t>
+            </a:r>
+          </a:p>
+        </p:txBody>
+      </p:sp>
+      <p:pic>
+        <p:nvPicPr>
+          <p:cNvPr id="3" name="Picture 2" descr="efa1e1800d865c0e.png"/>
+          <p:cNvPicPr>
+            <a:picLocks noChangeAspect="1"/>
+          </p:cNvPicPr>
+          <p:nvPr/>
+        </p:nvPicPr>
+        <p:blipFill>
+          <a:blip r:embed="rId2"/>
+          <a:stretch>
+            <a:fillRect/>
+          </a:stretch>
+        </p:blipFill>
+        <p:spPr>
+          <a:xfrm>
+            <a:off x="1285051" y="1097280"/>
+            <a:ext cx="6573898" cy="5303520"/>
+          </a:xfrm>
+          <a:prstGeom prst="rect">
+            <a:avLst/>
+          </a:prstGeom>
+        </p:spPr>
+      </p:pic>
     </p:spTree>
   </p:cSld>
   <p:clrMapOvr>
@@ -3653,7 +4044,7 @@
                   <a:srgbClr val="22282E"/>
                 </a:solidFill>
               </a:rPr>
-              <a:t>•  Adquirir la base de Python necesaria para escribir herramientas de seguridad: tipos, estructuras de datos, control de flujo, funciones, manejo de archivos y excepciones. Python es el lenguaje franco de la ciberseguridad ofensiva y defensiva, y esta clase asienta lo que usarás en sockets y Scapy.</a:t>
+              <a:t>•  Adquirir la base de Python necesaria para escribir herramientas de seguridad: tipos y estructuras de datos, control de flujo, funciones y módulos, manejo de archivos y gestión de errores con…</a:t>
             </a:r>
           </a:p>
         </p:txBody>
@@ -3757,67 +4148,82 @@
                   <a:srgbClr val="22282E"/>
                 </a:solidFill>
               </a:rPr>
-              <a:t>•  Manejar tipos, listas, diccionarios y comprensiones.</a:t>
-            </a:r>
-          </a:p>
-          <a:p>
-            <a:pPr>
-              <a:spcAft>
-                <a:spcPts val="600"/>
-              </a:spcAft>
-            </a:pPr>
-            <a:r>
-              <a:rPr sz="1500">
-                <a:solidFill>
-                  <a:srgbClr val="22282E"/>
-                </a:solidFill>
-              </a:rPr>
-              <a:t>•  Escribir control de flujo, funciones y módulos.</a:t>
-            </a:r>
-          </a:p>
-          <a:p>
-            <a:pPr>
-              <a:spcAft>
-                <a:spcPts val="600"/>
-              </a:spcAft>
-            </a:pPr>
-            <a:r>
-              <a:rPr sz="1500">
-                <a:solidFill>
-                  <a:srgbClr val="22282E"/>
-                </a:solidFill>
-              </a:rPr>
-              <a:t>•  Leer y escribir archivos y procesar su contenido.</a:t>
-            </a:r>
-          </a:p>
-          <a:p>
-            <a:pPr>
-              <a:spcAft>
-                <a:spcPts val="600"/>
-              </a:spcAft>
-            </a:pPr>
-            <a:r>
-              <a:rPr sz="1500">
-                <a:solidFill>
-                  <a:srgbClr val="22282E"/>
-                </a:solidFill>
-              </a:rPr>
-              <a:t>•  Gestionar errores con excepciones y usar la stdlib.</a:t>
-            </a:r>
-          </a:p>
-          <a:p>
-            <a:pPr>
-              <a:spcAft>
-                <a:spcPts val="600"/>
-              </a:spcAft>
-            </a:pPr>
-            <a:r>
-              <a:rPr sz="1500">
-                <a:solidFill>
-                  <a:srgbClr val="22282E"/>
-                </a:solidFill>
-              </a:rPr>
-              <a:t>•  Crear un script CLI de utilidad para seguridad.</a:t>
+              <a:t>•  Manejar tipos, listas, diccionarios, conjuntos y comprensiones con soltura.</a:t>
+            </a:r>
+          </a:p>
+          <a:p>
+            <a:pPr>
+              <a:spcAft>
+                <a:spcPts val="600"/>
+              </a:spcAft>
+            </a:pPr>
+            <a:r>
+              <a:rPr sz="1500">
+                <a:solidFill>
+                  <a:srgbClr val="22282E"/>
+                </a:solidFill>
+              </a:rPr>
+              <a:t>•  Escribir control de flujo, funciones reutilizables y módulos organizados.</a:t>
+            </a:r>
+          </a:p>
+          <a:p>
+            <a:pPr>
+              <a:spcAft>
+                <a:spcPts val="600"/>
+              </a:spcAft>
+            </a:pPr>
+            <a:r>
+              <a:rPr sz="1500">
+                <a:solidFill>
+                  <a:srgbClr val="22282E"/>
+                </a:solidFill>
+              </a:rPr>
+              <a:t>•  Leer y escribir archivos y procesar su contenido de forma eficiente.</a:t>
+            </a:r>
+          </a:p>
+          <a:p>
+            <a:pPr>
+              <a:spcAft>
+                <a:spcPts val="600"/>
+              </a:spcAft>
+            </a:pPr>
+            <a:r>
+              <a:rPr sz="1500">
+                <a:solidFill>
+                  <a:srgbClr val="22282E"/>
+                </a:solidFill>
+              </a:rPr>
+              <a:t>•  Gestionar errores con excepciones y apoyarse en la librería estándar.</a:t>
+            </a:r>
+          </a:p>
+          <a:p>
+            <a:pPr>
+              <a:spcAft>
+                <a:spcPts val="600"/>
+              </a:spcAft>
+            </a:pPr>
+            <a:r>
+              <a:rPr sz="1500">
+                <a:solidFill>
+                  <a:srgbClr val="22282E"/>
+                </a:solidFill>
+              </a:rPr>
+              <a:t>•  Crear un script CLI de utilidad para seguridad con argparse.</a:t>
+            </a:r>
+          </a:p>
+          <a:p>
+            <a:pPr>
+              <a:spcAft>
+                <a:spcPts val="600"/>
+              </a:spcAft>
+            </a:pPr>
+            <a:r>
+              <a:rPr sz="1500">
+                <a:solidFill>
+                  <a:srgbClr val="22282E"/>
+                </a:solidFill>
+              </a:rPr>
+              <a:t>•  Distinguir str de bytes y convertir entre ambos sin errores.</a:t>
             </a:r>
           </a:p>
         </p:txBody>
@@ -4047,7 +4453,7 @@
                   <a:srgbClr val="0B3D2E"/>
                 </a:solidFill>
               </a:rPr>
-              <a:t>📖 Definiciones y características</a:t>
+              <a:t>🧠 Explicación en profundidad</a:t>
             </a:r>
           </a:p>
         </p:txBody>
@@ -4085,82 +4491,97 @@
                   <a:srgbClr val="22282E"/>
                 </a:solidFill>
               </a:rPr>
-              <a:t>•  str vs. bytes: texto (unicode) frente a datos binarios crudos. Clave: la red y la cripto trabajan con bytes; conviértelos con .encode()/.decode().</a:t>
-            </a:r>
-          </a:p>
-          <a:p>
-            <a:pPr>
-              <a:spcAft>
-                <a:spcPts val="600"/>
-              </a:spcAft>
-            </a:pPr>
-            <a:r>
-              <a:rPr sz="1500">
-                <a:solidFill>
-                  <a:srgbClr val="22282E"/>
-                </a:solidFill>
-              </a:rPr>
-              <a:t>•  Diccionario: mapa clave→valor. Clave: base para contar, indexar y estructurar resultados (p. ej. IP→puertos).</a:t>
-            </a:r>
-          </a:p>
-          <a:p>
-            <a:pPr>
-              <a:spcAft>
-                <a:spcPts val="600"/>
-              </a:spcAft>
-            </a:pPr>
-            <a:r>
-              <a:rPr sz="1500">
-                <a:solidFill>
-                  <a:srgbClr val="22282E"/>
-                </a:solidFill>
-              </a:rPr>
-              <a:t>•  Comprensión de listas: [f(x) for x in it if cond]. Clave: transforma y filtra en una línea.</a:t>
-            </a:r>
-          </a:p>
-          <a:p>
-            <a:pPr>
-              <a:spcAft>
-                <a:spcPts val="600"/>
-              </a:spcAft>
-            </a:pPr>
-            <a:r>
-              <a:rPr sz="1500">
-                <a:solidFill>
-                  <a:srgbClr val="22282E"/>
-                </a:solidFill>
-              </a:rPr>
-              <a:t>•  Excepción: mecanismo de control de errores con try/except. Clave: evita que un fallo de red tumbe todo el script.</a:t>
-            </a:r>
-          </a:p>
-          <a:p>
-            <a:pPr>
-              <a:spcAft>
-                <a:spcPts val="600"/>
-              </a:spcAft>
-            </a:pPr>
-            <a:r>
-              <a:rPr sz="1500">
-                <a:solidFill>
-                  <a:srgbClr val="22282E"/>
-                </a:solidFill>
-              </a:rPr>
-              <a:t>•  argparse: módulo estándar para CLIs. Clave: parsea argumentos con ayuda y validación gratis.</a:t>
-            </a:r>
-          </a:p>
-          <a:p>
-            <a:pPr>
-              <a:spcAft>
-                <a:spcPts val="600"/>
-              </a:spcAft>
-            </a:pPr>
-            <a:r>
-              <a:rPr sz="1500">
-                <a:solidFill>
-                  <a:srgbClr val="22282E"/>
-                </a:solidFill>
-              </a:rPr>
-              <a:t>•  venv: entorno virtual aislado. Clave: separa dependencias por proyecto y evita romper el Python del sistema.</a:t>
+              <a:t>•  Python distingue tajantemente entre str (texto Unicode) y bytes (datos binarios crudos), y esa distinción es la fuente número uno de errores al programar herramientas de red. Una str es una secuencia…</a:t>
+            </a:r>
+          </a:p>
+          <a:p>
+            <a:pPr>
+              <a:spcAft>
+                <a:spcPts val="600"/>
+              </a:spcAft>
+            </a:pPr>
+            <a:r>
+              <a:rPr sz="1500">
+                <a:solidFill>
+                  <a:srgbClr val="22282E"/>
+                </a:solidFill>
+              </a:rPr>
+              <a:t>•  Python ofrece cuatro colecciones fundamentales, cada una con una vocación distinta. La lista (list) es una secuencia ordenada y mutable, ideal para acumular resultados. El diccionario (dict) es un…</a:t>
+            </a:r>
+          </a:p>
+          <a:p>
+            <a:pPr>
+              <a:spcAft>
+                <a:spcPts val="600"/>
+              </a:spcAft>
+            </a:pPr>
+            <a:r>
+              <a:rPr sz="1500">
+                <a:solidFill>
+                  <a:srgbClr val="22282E"/>
+                </a:solidFill>
+              </a:rPr>
+              <a:t>•  El control de flujo de Python (if, for, while) es directo, pero su rasgo más característico son las comprensiones, que transforman y filtran una colección en una sola línea legible: [f(x) for x in it…</a:t>
+            </a:r>
+          </a:p>
+          <a:p>
+            <a:pPr>
+              <a:spcAft>
+                <a:spcPts val="600"/>
+              </a:spcAft>
+            </a:pPr>
+            <a:r>
+              <a:rPr sz="1500">
+                <a:solidFill>
+                  <a:srgbClr val="22282E"/>
+                </a:solidFill>
+              </a:rPr>
+              <a:t>•  Una función encapsula lógica reutilizable y da nombre a una idea; agrupar funciones relacionadas en un módulo (un archivo .py) organiza el proyecto. Pero lo que separa un script de juguete de una…</a:t>
+            </a:r>
+          </a:p>
+          <a:p>
+            <a:pPr>
+              <a:spcAft>
+                <a:spcPts val="600"/>
+              </a:spcAft>
+            </a:pPr>
+            <a:r>
+              <a:rPr sz="1500">
+                <a:solidFill>
+                  <a:srgbClr val="22282E"/>
+                </a:solidFill>
+              </a:rPr>
+              <a:t>•  Módulo — Para qué sirve en seguridad</a:t>
+            </a:r>
+          </a:p>
+          <a:p>
+            <a:pPr>
+              <a:spcAft>
+                <a:spcPts val="600"/>
+              </a:spcAft>
+            </a:pPr>
+            <a:r>
+              <a:rPr sz="1500">
+                <a:solidFill>
+                  <a:srgbClr val="22282E"/>
+                </a:solidFill>
+              </a:rPr>
+              <a:t>•  os / sys — Rutas, variables de entorno, argumentos y salida del proceso</a:t>
+            </a:r>
+          </a:p>
+          <a:p>
+            <a:pPr>
+              <a:spcAft>
+                <a:spcPts val="600"/>
+              </a:spcAft>
+            </a:pPr>
+            <a:r>
+              <a:rPr sz="1500">
+                <a:solidFill>
+                  <a:srgbClr val="22282E"/>
+                </a:solidFill>
+              </a:rPr>
+              <a:t>•  subprocess — Ejecutar herramientas externas y capturar su salida</a:t>
             </a:r>
           </a:p>
         </p:txBody>
@@ -4211,7 +4632,7 @@
                   <a:srgbClr val="0B3D2E"/>
                 </a:solidFill>
               </a:rPr>
-              <a:t>🧰 Herramientas y preparación</a:t>
+              <a:t>📖 Definiciones y características</a:t>
             </a:r>
           </a:p>
         </p:txBody>
@@ -4249,52 +4670,97 @@
                   <a:srgbClr val="22282E"/>
                 </a:solidFill>
               </a:rPr>
-              <a:t>•  Necesitas Python 3 (ya en Kali) y un editor (VS Code recomendado con la extensión de Python). Crea un entorno virtual por proyecto:</a:t>
-            </a:r>
-          </a:p>
-          <a:p>
-            <a:pPr>
-              <a:spcAft>
-                <a:spcPts val="600"/>
-              </a:spcAft>
-            </a:pPr>
-            <a:r>
-              <a:rPr sz="1500">
-                <a:solidFill>
-                  <a:srgbClr val="22282E"/>
-                </a:solidFill>
-              </a:rPr>
-              <a:t>•  python3 -m venv venv &amp;&amp; source venv/bin/activate</a:t>
-            </a:r>
-          </a:p>
-          <a:p>
-            <a:pPr>
-              <a:spcAft>
-                <a:spcPts val="600"/>
-              </a:spcAft>
-            </a:pPr>
-            <a:r>
-              <a:rPr sz="1500">
-                <a:solidFill>
-                  <a:srgbClr val="22282E"/>
-                </a:solidFill>
-              </a:rPr>
-              <a:t>•  pip install requests</a:t>
-            </a:r>
-          </a:p>
-          <a:p>
-            <a:pPr>
-              <a:spcAft>
-                <a:spcPts val="600"/>
-              </a:spcAft>
-            </a:pPr>
-            <a:r>
-              <a:rPr sz="1500">
-                <a:solidFill>
-                  <a:srgbClr val="22282E"/>
-                </a:solidFill>
-              </a:rPr>
-              <a:t>•  Familiarízate con el REPL (python3) para experimentar y con pip para instalar librerías.</a:t>
+              <a:t>•  str vs. bytes: str es texto Unicode para humanos; bytes son octetos crudos que viajan por la red y alimentan la cripto. Se convierten con .encode() y .decode(), y confundirlos es el error más…</a:t>
+            </a:r>
+          </a:p>
+          <a:p>
+            <a:pPr>
+              <a:spcAft>
+                <a:spcPts val="600"/>
+              </a:spcAft>
+            </a:pPr>
+            <a:r>
+              <a:rPr sz="1500">
+                <a:solidFill>
+                  <a:srgbClr val="22282E"/>
+                </a:solidFill>
+              </a:rPr>
+              <a:t>•  Diccionario (dict): mapa de clave a valor con acceso en tiempo constante. Es la estructura base para indexar y estructurar resultados de seguridad, como ip -&gt; puertos.</a:t>
+            </a:r>
+          </a:p>
+          <a:p>
+            <a:pPr>
+              <a:spcAft>
+                <a:spcPts val="600"/>
+              </a:spcAft>
+            </a:pPr>
+            <a:r>
+              <a:rPr sz="1500">
+                <a:solidFill>
+                  <a:srgbClr val="22282E"/>
+                </a:solidFill>
+              </a:rPr>
+              <a:t>•  Conjunto (set): colección de elementos únicos sin orden, con pertenencia en tiempo constante. Ideal para deduplicar y comprobar existencia rápidamente.</a:t>
+            </a:r>
+          </a:p>
+          <a:p>
+            <a:pPr>
+              <a:spcAft>
+                <a:spcPts val="600"/>
+              </a:spcAft>
+            </a:pPr>
+            <a:r>
+              <a:rPr sz="1500">
+                <a:solidFill>
+                  <a:srgbClr val="22282E"/>
+                </a:solidFill>
+              </a:rPr>
+              <a:t>•  Comprensión de listas: expresión [f(x) for x in it if cond] que transforma y filtra en una línea. Sustituye bucles verbosos cuando sigue siendo legible.</a:t>
+            </a:r>
+          </a:p>
+          <a:p>
+            <a:pPr>
+              <a:spcAft>
+                <a:spcPts val="600"/>
+              </a:spcAft>
+            </a:pPr>
+            <a:r>
+              <a:rPr sz="1500">
+                <a:solidFill>
+                  <a:srgbClr val="22282E"/>
+                </a:solidFill>
+              </a:rPr>
+              <a:t>•  Excepción: mecanismo de control de errores con try/except. Capturar tipos concretos evita que un fallo de E/S o de red tumbe todo el script.</a:t>
+            </a:r>
+          </a:p>
+          <a:p>
+            <a:pPr>
+              <a:spcAft>
+                <a:spcPts val="600"/>
+              </a:spcAft>
+            </a:pPr>
+            <a:r>
+              <a:rPr sz="1500">
+                <a:solidFill>
+                  <a:srgbClr val="22282E"/>
+                </a:solidFill>
+              </a:rPr>
+              <a:t>•  argparse: módulo estándar para construir interfaces de línea de comandos. Aporta --help, parseo y validación de argumentos sin esfuerzo.</a:t>
+            </a:r>
+          </a:p>
+          <a:p>
+            <a:pPr>
+              <a:spcAft>
+                <a:spcPts val="600"/>
+              </a:spcAft>
+            </a:pPr>
+            <a:r>
+              <a:rPr sz="1500">
+                <a:solidFill>
+                  <a:srgbClr val="22282E"/>
+                </a:solidFill>
+              </a:rPr>
+              <a:t>•  hashlib: módulo estándar para calcular hashes criptográficos (SHA-256, etc.). Se usa para verificar integridad de archivos y comparar contra sha256sum.</a:t>
             </a:r>
           </a:p>
         </p:txBody>
@@ -4345,7 +4811,7 @@
                   <a:srgbClr val="0B3D2E"/>
                 </a:solidFill>
               </a:rPr>
-              <a:t>🧪 Laboratorio guiado</a:t>
+              <a:t>📔 Glosario</a:t>
             </a:r>
           </a:p>
         </p:txBody>
@@ -4383,97 +4849,97 @@
                   <a:srgbClr val="22282E"/>
                 </a:solidFill>
               </a:rPr>
-              <a:t>•  REPL y tipos. Explora conversiones str/bytes:</a:t>
-            </a:r>
-          </a:p>
-          <a:p>
-            <a:pPr>
-              <a:spcAft>
-                <a:spcPts val="600"/>
-              </a:spcAft>
-            </a:pPr>
-            <a:r>
-              <a:rPr sz="1500">
-                <a:solidFill>
-                  <a:srgbClr val="22282E"/>
-                </a:solidFill>
-              </a:rPr>
-              <a:t>•  b = "admin".encode(); print(b, b.hex(), b.decode())</a:t>
-            </a:r>
-          </a:p>
-          <a:p>
-            <a:pPr>
-              <a:spcAft>
-                <a:spcPts val="600"/>
-              </a:spcAft>
-            </a:pPr>
-            <a:r>
-              <a:rPr sz="1500">
-                <a:solidFill>
-                  <a:srgbClr val="22282E"/>
-                </a:solidFill>
-              </a:rPr>
-              <a:t>•  Estructuras de datos. Cuenta ocurrencias de IPs en una lista con un diccionario, y luego con collections.Counter.</a:t>
-            </a:r>
-          </a:p>
-          <a:p>
-            <a:pPr>
-              <a:spcAft>
-                <a:spcPts val="600"/>
-              </a:spcAft>
-            </a:pPr>
-            <a:r>
-              <a:rPr sz="1500">
-                <a:solidFill>
-                  <a:srgbClr val="22282E"/>
-                </a:solidFill>
-              </a:rPr>
-              <a:t>•  Leer un log. Escribe un script que abra un archivo de log y cuente líneas con "error":</a:t>
-            </a:r>
-          </a:p>
-          <a:p>
-            <a:pPr>
-              <a:spcAft>
-                <a:spcPts val="600"/>
-              </a:spcAft>
-            </a:pPr>
-            <a:r>
-              <a:rPr sz="1500">
-                <a:solidFill>
-                  <a:srgbClr val="22282E"/>
-                </a:solidFill>
-              </a:rPr>
-              <a:t>•  with open("app.log") as f:</a:t>
-            </a:r>
-          </a:p>
-          <a:p>
-            <a:pPr>
-              <a:spcAft>
-                <a:spcPts val="600"/>
-              </a:spcAft>
-            </a:pPr>
-            <a:r>
-              <a:rPr sz="1500">
-                <a:solidFill>
-                  <a:srgbClr val="22282E"/>
-                </a:solidFill>
-              </a:rPr>
-              <a:t>•  errores = sum(1 for line in f if "error" in line.lower())</a:t>
-            </a:r>
-          </a:p>
-          <a:p>
-            <a:pPr>
-              <a:spcAft>
-                <a:spcPts val="600"/>
-              </a:spcAft>
-            </a:pPr>
-            <a:r>
-              <a:rPr sz="1500">
-                <a:solidFill>
-                  <a:srgbClr val="22282E"/>
-                </a:solidFill>
-              </a:rPr>
-              <a:t>•  print(f"Errores: {errores}")</a:t>
+              <a:t>•  Término — Definición concisa</a:t>
+            </a:r>
+          </a:p>
+          <a:p>
+            <a:pPr>
+              <a:spcAft>
+                <a:spcPts val="600"/>
+              </a:spcAft>
+            </a:pPr>
+            <a:r>
+              <a:rPr sz="1500">
+                <a:solidFill>
+                  <a:srgbClr val="22282E"/>
+                </a:solidFill>
+              </a:rPr>
+              <a:t>•  str — Secuencia de caracteres Unicode (texto).</a:t>
+            </a:r>
+          </a:p>
+          <a:p>
+            <a:pPr>
+              <a:spcAft>
+                <a:spcPts val="600"/>
+              </a:spcAft>
+            </a:pPr>
+            <a:r>
+              <a:rPr sz="1500">
+                <a:solidFill>
+                  <a:srgbClr val="22282E"/>
+                </a:solidFill>
+              </a:rPr>
+              <a:t>•  bytes — Secuencia de octetos crudos (datos binarios).</a:t>
+            </a:r>
+          </a:p>
+          <a:p>
+            <a:pPr>
+              <a:spcAft>
+                <a:spcPts val="600"/>
+              </a:spcAft>
+            </a:pPr>
+            <a:r>
+              <a:rPr sz="1500">
+                <a:solidFill>
+                  <a:srgbClr val="22282E"/>
+                </a:solidFill>
+              </a:rPr>
+              <a:t>•  encode / decode — Conversión entre texto y bytes eligiendo codificación.</a:t>
+            </a:r>
+          </a:p>
+          <a:p>
+            <a:pPr>
+              <a:spcAft>
+                <a:spcPts val="600"/>
+              </a:spcAft>
+            </a:pPr>
+            <a:r>
+              <a:rPr sz="1500">
+                <a:solidFill>
+                  <a:srgbClr val="22282E"/>
+                </a:solidFill>
+              </a:rPr>
+              <a:t>•  list — Secuencia ordenada y mutable.</a:t>
+            </a:r>
+          </a:p>
+          <a:p>
+            <a:pPr>
+              <a:spcAft>
+                <a:spcPts val="600"/>
+              </a:spcAft>
+            </a:pPr>
+            <a:r>
+              <a:rPr sz="1500">
+                <a:solidFill>
+                  <a:srgbClr val="22282E"/>
+                </a:solidFill>
+              </a:rPr>
+              <a:t>•  dict — Mapa clave-valor con acceso rápido.</a:t>
+            </a:r>
+          </a:p>
+          <a:p>
+            <a:pPr>
+              <a:spcAft>
+                <a:spcPts val="600"/>
+              </a:spcAft>
+            </a:pPr>
+            <a:r>
+              <a:rPr sz="1500">
+                <a:solidFill>
+                  <a:srgbClr val="22282E"/>
+                </a:solidFill>
+              </a:rPr>
+              <a:t>•  set — Colección de elementos únicos sin orden.</a:t>
             </a:r>
           </a:p>
         </p:txBody>
@@ -4524,7 +4990,7 @@
                   <a:srgbClr val="0B3D2E"/>
                 </a:solidFill>
               </a:rPr>
-              <a:t>✍️ Ejercicios</a:t>
+              <a:t>🧰 Herramientas y preparación</a:t>
             </a:r>
           </a:p>
         </p:txBody>
@@ -4562,82 +5028,22 @@
                   <a:srgbClr val="22282E"/>
                 </a:solidFill>
               </a:rPr>
-              <a:t>•  Escribe una comprensión que devuelva solo las IPs privadas de una lista.</a:t>
-            </a:r>
-          </a:p>
-          <a:p>
-            <a:pPr>
-              <a:spcAft>
-                <a:spcPts val="600"/>
-              </a:spcAft>
-            </a:pPr>
-            <a:r>
-              <a:rPr sz="1500">
-                <a:solidFill>
-                  <a:srgbClr val="22282E"/>
-                </a:solidFill>
-              </a:rPr>
-              <a:t>•  Crea un diccionario que agrupe usuarios por su shell leyendo /etc/passwd.</a:t>
-            </a:r>
-          </a:p>
-          <a:p>
-            <a:pPr>
-              <a:spcAft>
-                <a:spcPts val="600"/>
-              </a:spcAft>
-            </a:pPr>
-            <a:r>
-              <a:rPr sz="1500">
-                <a:solidFill>
-                  <a:srgbClr val="22282E"/>
-                </a:solidFill>
-              </a:rPr>
-              <a:t>•  Implementa una función que valide si una cadena es una IPv4 bien formada (sin regex).</a:t>
-            </a:r>
-          </a:p>
-          <a:p>
-            <a:pPr>
-              <a:spcAft>
-                <a:spcPts val="600"/>
-              </a:spcAft>
-            </a:pPr>
-            <a:r>
-              <a:rPr sz="1500">
-                <a:solidFill>
-                  <a:srgbClr val="22282E"/>
-                </a:solidFill>
-              </a:rPr>
-              <a:t>•  Lee un archivo grande línea a línea y extrae todas las que contengan un código HTTP 5xx.</a:t>
-            </a:r>
-          </a:p>
-          <a:p>
-            <a:pPr>
-              <a:spcAft>
-                <a:spcPts val="600"/>
-              </a:spcAft>
-            </a:pPr>
-            <a:r>
-              <a:rPr sz="1500">
-                <a:solidFill>
-                  <a:srgbClr val="22282E"/>
-                </a:solidFill>
-              </a:rPr>
-              <a:t>•  Añade manejo de excepciones para permisos denegados y archivo inexistente.</a:t>
-            </a:r>
-          </a:p>
-          <a:p>
-            <a:pPr>
-              <a:spcAft>
-                <a:spcPts val="600"/>
-              </a:spcAft>
-            </a:pPr>
-            <a:r>
-              <a:rPr sz="1500">
-                <a:solidFill>
-                  <a:srgbClr val="22282E"/>
-                </a:solidFill>
-              </a:rPr>
-              <a:t>•  Empaqueta tu utilidad con argparse, incluyendo --help y un argumento opcional.</a:t>
+              <a:t>•  Necesitas Python 3 (ya presente en Kali) y un editor cómodo; VS Code con la extensión oficial de Python es una buena opción por su depurador y linting. Crea un entorno virtual por proyecto antes de…</a:t>
+            </a:r>
+          </a:p>
+          <a:p>
+            <a:pPr>
+              <a:spcAft>
+                <a:spcPts val="600"/>
+              </a:spcAft>
+            </a:pPr>
+            <a:r>
+              <a:rPr sz="1500">
+                <a:solidFill>
+                  <a:srgbClr val="22282E"/>
+                </a:solidFill>
+              </a:rPr>
+              <a:t>•  Familiarízate con el REPL (ejecuta python3 sin argumentos) para experimentar con expresiones al vuelo, y con pip para instalar librerías dentro del entorno activo. Verifica tu versión con python3…</a:t>
             </a:r>
           </a:p>
         </p:txBody>
@@ -4688,7 +5094,7 @@
                   <a:srgbClr val="0B3D2E"/>
                 </a:solidFill>
               </a:rPr>
-              <a:t>📝 Reto verificable</a:t>
+              <a:t>🧪 Laboratorio guiado</a:t>
             </a:r>
           </a:p>
         </p:txBody>
@@ -4726,22 +5132,97 @@
                   <a:srgbClr val="22282E"/>
                 </a:solidFill>
               </a:rPr>
-              <a:t>•  Escribe logstats.py, una herramienta CLI que reciba la ruta de un log y un patrón, y produzca un pequeño informe: total de líneas, líneas coincidentes, top 5 de las IPs más frecuentes (si las hay) y el SHA-256 del archivo. Debe manejar errores de archivo con mensajes claros y tener --help.</a:t>
-            </a:r>
-          </a:p>
-          <a:p>
-            <a:pPr>
-              <a:spcAft>
-                <a:spcPts val="600"/>
-              </a:spcAft>
-            </a:pPr>
-            <a:r>
-              <a:rPr sz="1500">
-                <a:solidFill>
-                  <a:srgbClr val="22282E"/>
-                </a:solidFill>
-              </a:rPr>
-              <a:t>•  Criterio de aceptación: ejecutar python3 logstats.py --help muestra el uso; corriendo sobre un log real produce el informe correcto; y ante un archivo inexistente termina con un mensaje amable y código de salida ≠ 0. El SHA-256 coincide con el de sha256sum.</a:t>
+              <a:t>•  REPL y tipos. Explora las conversiones entre str y bytes:</a:t>
+            </a:r>
+          </a:p>
+          <a:p>
+            <a:pPr>
+              <a:spcAft>
+                <a:spcPts val="600"/>
+              </a:spcAft>
+            </a:pPr>
+            <a:r>
+              <a:rPr sz="1500">
+                <a:solidFill>
+                  <a:srgbClr val="22282E"/>
+                </a:solidFill>
+              </a:rPr>
+              <a:t>•  Estructuras de datos. Cuenta ocurrencias de IPs en una lista, primero con un diccionario manual y luego con collections.Counter, y compara.</a:t>
+            </a:r>
+          </a:p>
+          <a:p>
+            <a:pPr>
+              <a:spcAft>
+                <a:spcPts val="600"/>
+              </a:spcAft>
+            </a:pPr>
+            <a:r>
+              <a:rPr sz="1500">
+                <a:solidFill>
+                  <a:srgbClr val="22282E"/>
+                </a:solidFill>
+              </a:rPr>
+              <a:t>•  Leer un log. Escribe un script que abra un archivo y cuente líneas que contengan "error":</a:t>
+            </a:r>
+          </a:p>
+          <a:p>
+            <a:pPr>
+              <a:spcAft>
+                <a:spcPts val="600"/>
+              </a:spcAft>
+            </a:pPr>
+            <a:r>
+              <a:rPr sz="1500">
+                <a:solidFill>
+                  <a:srgbClr val="22282E"/>
+                </a:solidFill>
+              </a:rPr>
+              <a:t>•  Funciones y módulos. Extrae la lógica a una función contarpatron(ruta, patron) y llámala desde una función main().</a:t>
+            </a:r>
+          </a:p>
+          <a:p>
+            <a:pPr>
+              <a:spcAft>
+                <a:spcPts val="600"/>
+              </a:spcAft>
+            </a:pPr>
+            <a:r>
+              <a:rPr sz="1500">
+                <a:solidFill>
+                  <a:srgbClr val="22282E"/>
+                </a:solidFill>
+              </a:rPr>
+              <a:t>•  Excepciones. Envuelve la apertura del archivo en try/except FileNotFoundError para fallar con un mensaje claro.</a:t>
+            </a:r>
+          </a:p>
+          <a:p>
+            <a:pPr>
+              <a:spcAft>
+                <a:spcPts val="600"/>
+              </a:spcAft>
+            </a:pPr>
+            <a:r>
+              <a:rPr sz="1500">
+                <a:solidFill>
+                  <a:srgbClr val="22282E"/>
+                </a:solidFill>
+              </a:rPr>
+              <a:t>•  CLI con argparse. Convierte el script en una herramienta con argumentos:</a:t>
+            </a:r>
+          </a:p>
+          <a:p>
+            <a:pPr>
+              <a:spcAft>
+                <a:spcPts val="600"/>
+              </a:spcAft>
+            </a:pPr>
+            <a:r>
+              <a:rPr sz="1500">
+                <a:solidFill>
+                  <a:srgbClr val="22282E"/>
+                </a:solidFill>
+              </a:rPr>
+              <a:t>•  hashlib. Añade una función que calcule el SHA-256 de un archivo, leyéndolo por bloques (adelanto de la Clase 021).</a:t>
             </a:r>
           </a:p>
         </p:txBody>
